--- a/Documentation/Workflow.pptx
+++ b/Documentation/Workflow.pptx
@@ -4,8 +4,14 @@
   <p:sldMasterIdLst>
     <p:sldMasterId id="2147483648" r:id="rId1"/>
   </p:sldMasterIdLst>
+  <p:notesMasterIdLst>
+    <p:notesMasterId r:id="rId6"/>
+  </p:notesMasterIdLst>
   <p:sldIdLst>
     <p:sldId id="257" r:id="rId2"/>
+    <p:sldId id="260" r:id="rId3"/>
+    <p:sldId id="258" r:id="rId4"/>
+    <p:sldId id="259" r:id="rId5"/>
   </p:sldIdLst>
   <p:sldSz cx="12192000" cy="6858000"/>
   <p:notesSz cx="6858000" cy="9144000"/>
@@ -104,6 +110,11 @@
       </a:defRPr>
     </a:lvl9pPr>
   </p:defaultTextStyle>
+  <p:extLst>
+    <p:ext uri="{EFAFB233-063F-42B5-8137-9DF3F51BA10A}">
+      <p15:sldGuideLst xmlns:p15="http://schemas.microsoft.com/office/powerpoint/2012/main"/>
+    </p:ext>
+  </p:extLst>
 </p:presentation>
 </file>
 
@@ -199,7 +210,7 @@
       <pc:sldMk xmlns:pc="http://schemas.microsoft.com/office/powerpoint/2013/main/command" cId="399841200" sldId="257"/>
       <ac:spMk id="33" creationId="{7264900C-EEC6-10B9-EC1B-AA3731C5A02F}"/>
       <ac:txMk cp="0" len="17">
-        <ac:context len="18" hash="3335568333"/>
+        <ac:context len="45" hash="2430953953"/>
       </ac:txMk>
     </ac:txMkLst>
     <p188:pos x="1603497" y="2560808"/>
@@ -215,6 +226,440 @@
     </p188:txBody>
   </p188:cm>
 </p188:cmLst>
+</file>
+
+<file path=ppt/notesMasters/notesMaster1.xml><?xml version="1.0" encoding="utf-8"?>
+<p:notesMaster xmlns:a="http://schemas.openxmlformats.org/drawingml/2006/main" xmlns:r="http://schemas.openxmlformats.org/officeDocument/2006/relationships" xmlns:p="http://schemas.openxmlformats.org/presentationml/2006/main">
+  <p:cSld>
+    <p:bg>
+      <p:bgRef idx="1001">
+        <a:schemeClr val="bg1"/>
+      </p:bgRef>
+    </p:bg>
+    <p:spTree>
+      <p:nvGrpSpPr>
+        <p:cNvPr id="1" name=""/>
+        <p:cNvGrpSpPr/>
+        <p:nvPr/>
+      </p:nvGrpSpPr>
+      <p:grpSpPr>
+        <a:xfrm>
+          <a:off x="0" y="0"/>
+          <a:ext cx="0" cy="0"/>
+          <a:chOff x="0" y="0"/>
+          <a:chExt cx="0" cy="0"/>
+        </a:xfrm>
+      </p:grpSpPr>
+      <p:sp>
+        <p:nvSpPr>
+          <p:cNvPr id="2" name="Header Placeholder 1"/>
+          <p:cNvSpPr>
+            <a:spLocks noGrp="1"/>
+          </p:cNvSpPr>
+          <p:nvPr>
+            <p:ph type="hdr" sz="quarter"/>
+          </p:nvPr>
+        </p:nvSpPr>
+        <p:spPr>
+          <a:xfrm>
+            <a:off x="0" y="0"/>
+            <a:ext cx="2971800" cy="458788"/>
+          </a:xfrm>
+          <a:prstGeom prst="rect">
+            <a:avLst/>
+          </a:prstGeom>
+        </p:spPr>
+        <p:txBody>
+          <a:bodyPr vert="horz" lIns="91440" tIns="45720" rIns="91440" bIns="45720" rtlCol="0"/>
+          <a:lstStyle>
+            <a:lvl1pPr algn="l">
+              <a:defRPr sz="1200"/>
+            </a:lvl1pPr>
+          </a:lstStyle>
+          <a:p>
+            <a:endParaRPr lang="en-US"/>
+          </a:p>
+        </p:txBody>
+      </p:sp>
+      <p:sp>
+        <p:nvSpPr>
+          <p:cNvPr id="3" name="Date Placeholder 2"/>
+          <p:cNvSpPr>
+            <a:spLocks noGrp="1"/>
+          </p:cNvSpPr>
+          <p:nvPr>
+            <p:ph type="dt" idx="1"/>
+          </p:nvPr>
+        </p:nvSpPr>
+        <p:spPr>
+          <a:xfrm>
+            <a:off x="3884613" y="0"/>
+            <a:ext cx="2971800" cy="458788"/>
+          </a:xfrm>
+          <a:prstGeom prst="rect">
+            <a:avLst/>
+          </a:prstGeom>
+        </p:spPr>
+        <p:txBody>
+          <a:bodyPr vert="horz" lIns="91440" tIns="45720" rIns="91440" bIns="45720" rtlCol="0"/>
+          <a:lstStyle>
+            <a:lvl1pPr algn="r">
+              <a:defRPr sz="1200"/>
+            </a:lvl1pPr>
+          </a:lstStyle>
+          <a:p>
+            <a:fld id="{FB6682E5-FC27-4643-A2ED-FC8C63F16A1E}" type="datetimeFigureOut">
+              <a:rPr lang="en-US" smtClean="0"/>
+              <a:t>12/18/23</a:t>
+            </a:fld>
+            <a:endParaRPr lang="en-US"/>
+          </a:p>
+        </p:txBody>
+      </p:sp>
+      <p:sp>
+        <p:nvSpPr>
+          <p:cNvPr id="4" name="Slide Image Placeholder 3"/>
+          <p:cNvSpPr>
+            <a:spLocks noGrp="1" noRot="1" noChangeAspect="1"/>
+          </p:cNvSpPr>
+          <p:nvPr>
+            <p:ph type="sldImg" idx="2"/>
+          </p:nvPr>
+        </p:nvSpPr>
+        <p:spPr>
+          <a:xfrm>
+            <a:off x="685800" y="1143000"/>
+            <a:ext cx="5486400" cy="3086100"/>
+          </a:xfrm>
+          <a:prstGeom prst="rect">
+            <a:avLst/>
+          </a:prstGeom>
+          <a:noFill/>
+          <a:ln w="12700">
+            <a:solidFill>
+              <a:prstClr val="black"/>
+            </a:solidFill>
+          </a:ln>
+        </p:spPr>
+        <p:txBody>
+          <a:bodyPr vert="horz" lIns="91440" tIns="45720" rIns="91440" bIns="45720" rtlCol="0" anchor="ctr"/>
+          <a:lstStyle/>
+          <a:p>
+            <a:endParaRPr lang="en-US"/>
+          </a:p>
+        </p:txBody>
+      </p:sp>
+      <p:sp>
+        <p:nvSpPr>
+          <p:cNvPr id="5" name="Notes Placeholder 4"/>
+          <p:cNvSpPr>
+            <a:spLocks noGrp="1"/>
+          </p:cNvSpPr>
+          <p:nvPr>
+            <p:ph type="body" sz="quarter" idx="3"/>
+          </p:nvPr>
+        </p:nvSpPr>
+        <p:spPr>
+          <a:xfrm>
+            <a:off x="685800" y="4400550"/>
+            <a:ext cx="5486400" cy="3600450"/>
+          </a:xfrm>
+          <a:prstGeom prst="rect">
+            <a:avLst/>
+          </a:prstGeom>
+        </p:spPr>
+        <p:txBody>
+          <a:bodyPr vert="horz" lIns="91440" tIns="45720" rIns="91440" bIns="45720" rtlCol="0"/>
+          <a:lstStyle/>
+          <a:p>
+            <a:pPr lvl="0"/>
+            <a:r>
+              <a:rPr lang="en-GB"/>
+              <a:t>Click to edit Master text styles</a:t>
+            </a:r>
+          </a:p>
+          <a:p>
+            <a:pPr lvl="1"/>
+            <a:r>
+              <a:rPr lang="en-GB"/>
+              <a:t>Second level</a:t>
+            </a:r>
+          </a:p>
+          <a:p>
+            <a:pPr lvl="2"/>
+            <a:r>
+              <a:rPr lang="en-GB"/>
+              <a:t>Third level</a:t>
+            </a:r>
+          </a:p>
+          <a:p>
+            <a:pPr lvl="3"/>
+            <a:r>
+              <a:rPr lang="en-GB"/>
+              <a:t>Fourth level</a:t>
+            </a:r>
+          </a:p>
+          <a:p>
+            <a:pPr lvl="4"/>
+            <a:r>
+              <a:rPr lang="en-GB"/>
+              <a:t>Fifth level</a:t>
+            </a:r>
+            <a:endParaRPr lang="en-US"/>
+          </a:p>
+        </p:txBody>
+      </p:sp>
+      <p:sp>
+        <p:nvSpPr>
+          <p:cNvPr id="6" name="Footer Placeholder 5"/>
+          <p:cNvSpPr>
+            <a:spLocks noGrp="1"/>
+          </p:cNvSpPr>
+          <p:nvPr>
+            <p:ph type="ftr" sz="quarter" idx="4"/>
+          </p:nvPr>
+        </p:nvSpPr>
+        <p:spPr>
+          <a:xfrm>
+            <a:off x="0" y="8685213"/>
+            <a:ext cx="2971800" cy="458787"/>
+          </a:xfrm>
+          <a:prstGeom prst="rect">
+            <a:avLst/>
+          </a:prstGeom>
+        </p:spPr>
+        <p:txBody>
+          <a:bodyPr vert="horz" lIns="91440" tIns="45720" rIns="91440" bIns="45720" rtlCol="0" anchor="b"/>
+          <a:lstStyle>
+            <a:lvl1pPr algn="l">
+              <a:defRPr sz="1200"/>
+            </a:lvl1pPr>
+          </a:lstStyle>
+          <a:p>
+            <a:endParaRPr lang="en-US"/>
+          </a:p>
+        </p:txBody>
+      </p:sp>
+      <p:sp>
+        <p:nvSpPr>
+          <p:cNvPr id="7" name="Slide Number Placeholder 6"/>
+          <p:cNvSpPr>
+            <a:spLocks noGrp="1"/>
+          </p:cNvSpPr>
+          <p:nvPr>
+            <p:ph type="sldNum" sz="quarter" idx="5"/>
+          </p:nvPr>
+        </p:nvSpPr>
+        <p:spPr>
+          <a:xfrm>
+            <a:off x="3884613" y="8685213"/>
+            <a:ext cx="2971800" cy="458787"/>
+          </a:xfrm>
+          <a:prstGeom prst="rect">
+            <a:avLst/>
+          </a:prstGeom>
+        </p:spPr>
+        <p:txBody>
+          <a:bodyPr vert="horz" lIns="91440" tIns="45720" rIns="91440" bIns="45720" rtlCol="0" anchor="b"/>
+          <a:lstStyle>
+            <a:lvl1pPr algn="r">
+              <a:defRPr sz="1200"/>
+            </a:lvl1pPr>
+          </a:lstStyle>
+          <a:p>
+            <a:fld id="{EAF336E4-9453-2843-90EF-2D9416610670}" type="slidenum">
+              <a:rPr lang="en-US" smtClean="0"/>
+              <a:t>‹#›</a:t>
+            </a:fld>
+            <a:endParaRPr lang="en-US"/>
+          </a:p>
+        </p:txBody>
+      </p:sp>
+    </p:spTree>
+    <p:extLst>
+      <p:ext uri="{BB962C8B-B14F-4D97-AF65-F5344CB8AC3E}">
+        <p14:creationId xmlns:p14="http://schemas.microsoft.com/office/powerpoint/2010/main" val="3296008981"/>
+      </p:ext>
+    </p:extLst>
+  </p:cSld>
+  <p:clrMap bg1="lt1" tx1="dk1" bg2="lt2" tx2="dk2" accent1="accent1" accent2="accent2" accent3="accent3" accent4="accent4" accent5="accent5" accent6="accent6" hlink="hlink" folHlink="folHlink"/>
+  <p:notesStyle>
+    <a:lvl1pPr marL="0" algn="l" defTabSz="914400" rtl="0" eaLnBrk="1" latinLnBrk="0" hangingPunct="1">
+      <a:defRPr sz="1200" kern="1200">
+        <a:solidFill>
+          <a:schemeClr val="tx1"/>
+        </a:solidFill>
+        <a:latin typeface="+mn-lt"/>
+        <a:ea typeface="+mn-ea"/>
+        <a:cs typeface="+mn-cs"/>
+      </a:defRPr>
+    </a:lvl1pPr>
+    <a:lvl2pPr marL="457200" algn="l" defTabSz="914400" rtl="0" eaLnBrk="1" latinLnBrk="0" hangingPunct="1">
+      <a:defRPr sz="1200" kern="1200">
+        <a:solidFill>
+          <a:schemeClr val="tx1"/>
+        </a:solidFill>
+        <a:latin typeface="+mn-lt"/>
+        <a:ea typeface="+mn-ea"/>
+        <a:cs typeface="+mn-cs"/>
+      </a:defRPr>
+    </a:lvl2pPr>
+    <a:lvl3pPr marL="914400" algn="l" defTabSz="914400" rtl="0" eaLnBrk="1" latinLnBrk="0" hangingPunct="1">
+      <a:defRPr sz="1200" kern="1200">
+        <a:solidFill>
+          <a:schemeClr val="tx1"/>
+        </a:solidFill>
+        <a:latin typeface="+mn-lt"/>
+        <a:ea typeface="+mn-ea"/>
+        <a:cs typeface="+mn-cs"/>
+      </a:defRPr>
+    </a:lvl3pPr>
+    <a:lvl4pPr marL="1371600" algn="l" defTabSz="914400" rtl="0" eaLnBrk="1" latinLnBrk="0" hangingPunct="1">
+      <a:defRPr sz="1200" kern="1200">
+        <a:solidFill>
+          <a:schemeClr val="tx1"/>
+        </a:solidFill>
+        <a:latin typeface="+mn-lt"/>
+        <a:ea typeface="+mn-ea"/>
+        <a:cs typeface="+mn-cs"/>
+      </a:defRPr>
+    </a:lvl4pPr>
+    <a:lvl5pPr marL="1828800" algn="l" defTabSz="914400" rtl="0" eaLnBrk="1" latinLnBrk="0" hangingPunct="1">
+      <a:defRPr sz="1200" kern="1200">
+        <a:solidFill>
+          <a:schemeClr val="tx1"/>
+        </a:solidFill>
+        <a:latin typeface="+mn-lt"/>
+        <a:ea typeface="+mn-ea"/>
+        <a:cs typeface="+mn-cs"/>
+      </a:defRPr>
+    </a:lvl5pPr>
+    <a:lvl6pPr marL="2286000" algn="l" defTabSz="914400" rtl="0" eaLnBrk="1" latinLnBrk="0" hangingPunct="1">
+      <a:defRPr sz="1200" kern="1200">
+        <a:solidFill>
+          <a:schemeClr val="tx1"/>
+        </a:solidFill>
+        <a:latin typeface="+mn-lt"/>
+        <a:ea typeface="+mn-ea"/>
+        <a:cs typeface="+mn-cs"/>
+      </a:defRPr>
+    </a:lvl6pPr>
+    <a:lvl7pPr marL="2743200" algn="l" defTabSz="914400" rtl="0" eaLnBrk="1" latinLnBrk="0" hangingPunct="1">
+      <a:defRPr sz="1200" kern="1200">
+        <a:solidFill>
+          <a:schemeClr val="tx1"/>
+        </a:solidFill>
+        <a:latin typeface="+mn-lt"/>
+        <a:ea typeface="+mn-ea"/>
+        <a:cs typeface="+mn-cs"/>
+      </a:defRPr>
+    </a:lvl7pPr>
+    <a:lvl8pPr marL="3200400" algn="l" defTabSz="914400" rtl="0" eaLnBrk="1" latinLnBrk="0" hangingPunct="1">
+      <a:defRPr sz="1200" kern="1200">
+        <a:solidFill>
+          <a:schemeClr val="tx1"/>
+        </a:solidFill>
+        <a:latin typeface="+mn-lt"/>
+        <a:ea typeface="+mn-ea"/>
+        <a:cs typeface="+mn-cs"/>
+      </a:defRPr>
+    </a:lvl8pPr>
+    <a:lvl9pPr marL="3657600" algn="l" defTabSz="914400" rtl="0" eaLnBrk="1" latinLnBrk="0" hangingPunct="1">
+      <a:defRPr sz="1200" kern="1200">
+        <a:solidFill>
+          <a:schemeClr val="tx1"/>
+        </a:solidFill>
+        <a:latin typeface="+mn-lt"/>
+        <a:ea typeface="+mn-ea"/>
+        <a:cs typeface="+mn-cs"/>
+      </a:defRPr>
+    </a:lvl9pPr>
+  </p:notesStyle>
+</p:notesMaster>
+</file>
+
+<file path=ppt/notesSlides/notesSlide1.xml><?xml version="1.0" encoding="utf-8"?>
+<p:notes xmlns:a="http://schemas.openxmlformats.org/drawingml/2006/main" xmlns:r="http://schemas.openxmlformats.org/officeDocument/2006/relationships" xmlns:p="http://schemas.openxmlformats.org/presentationml/2006/main">
+  <p:cSld>
+    <p:spTree>
+      <p:nvGrpSpPr>
+        <p:cNvPr id="1" name=""/>
+        <p:cNvGrpSpPr/>
+        <p:nvPr/>
+      </p:nvGrpSpPr>
+      <p:grpSpPr>
+        <a:xfrm>
+          <a:off x="0" y="0"/>
+          <a:ext cx="0" cy="0"/>
+          <a:chOff x="0" y="0"/>
+          <a:chExt cx="0" cy="0"/>
+        </a:xfrm>
+      </p:grpSpPr>
+      <p:sp>
+        <p:nvSpPr>
+          <p:cNvPr id="2" name="Slide Image Placeholder 1"/>
+          <p:cNvSpPr>
+            <a:spLocks noGrp="1" noRot="1" noChangeAspect="1"/>
+          </p:cNvSpPr>
+          <p:nvPr>
+            <p:ph type="sldImg"/>
+          </p:nvPr>
+        </p:nvSpPr>
+        <p:spPr/>
+      </p:sp>
+      <p:sp>
+        <p:nvSpPr>
+          <p:cNvPr id="3" name="Notes Placeholder 2"/>
+          <p:cNvSpPr>
+            <a:spLocks noGrp="1"/>
+          </p:cNvSpPr>
+          <p:nvPr>
+            <p:ph type="body" idx="1"/>
+          </p:nvPr>
+        </p:nvSpPr>
+        <p:spPr/>
+        <p:txBody>
+          <a:bodyPr/>
+          <a:lstStyle/>
+          <a:p>
+            <a:endParaRPr lang="en-US" dirty="0"/>
+          </a:p>
+        </p:txBody>
+      </p:sp>
+      <p:sp>
+        <p:nvSpPr>
+          <p:cNvPr id="4" name="Slide Number Placeholder 3"/>
+          <p:cNvSpPr>
+            <a:spLocks noGrp="1"/>
+          </p:cNvSpPr>
+          <p:nvPr>
+            <p:ph type="sldNum" sz="quarter" idx="5"/>
+          </p:nvPr>
+        </p:nvSpPr>
+        <p:spPr/>
+        <p:txBody>
+          <a:bodyPr/>
+          <a:lstStyle/>
+          <a:p>
+            <a:fld id="{EAF336E4-9453-2843-90EF-2D9416610670}" type="slidenum">
+              <a:rPr lang="en-US" smtClean="0"/>
+              <a:t>1</a:t>
+            </a:fld>
+            <a:endParaRPr lang="en-US"/>
+          </a:p>
+        </p:txBody>
+      </p:sp>
+    </p:spTree>
+    <p:extLst>
+      <p:ext uri="{BB962C8B-B14F-4D97-AF65-F5344CB8AC3E}">
+        <p14:creationId xmlns:p14="http://schemas.microsoft.com/office/powerpoint/2010/main" val="3347997543"/>
+      </p:ext>
+    </p:extLst>
+  </p:cSld>
+  <p:clrMapOvr>
+    <a:masterClrMapping/>
+  </p:clrMapOvr>
+</p:notes>
 </file>
 
 <file path=ppt/slideLayouts/slideLayout1.xml><?xml version="1.0" encoding="utf-8"?>
@@ -364,7 +809,7 @@
           <a:p>
             <a:fld id="{E9965892-A207-314E-BD7B-266B1DC85234}" type="datetimeFigureOut">
               <a:rPr lang="en-US" smtClean="0"/>
-              <a:t>10/2/23</a:t>
+              <a:t>12/18/23</a:t>
             </a:fld>
             <a:endParaRPr lang="en-US"/>
           </a:p>
@@ -562,7 +1007,7 @@
           <a:p>
             <a:fld id="{E9965892-A207-314E-BD7B-266B1DC85234}" type="datetimeFigureOut">
               <a:rPr lang="en-US" smtClean="0"/>
-              <a:t>10/2/23</a:t>
+              <a:t>12/18/23</a:t>
             </a:fld>
             <a:endParaRPr lang="en-US"/>
           </a:p>
@@ -770,7 +1215,7 @@
           <a:p>
             <a:fld id="{E9965892-A207-314E-BD7B-266B1DC85234}" type="datetimeFigureOut">
               <a:rPr lang="en-US" smtClean="0"/>
-              <a:t>10/2/23</a:t>
+              <a:t>12/18/23</a:t>
             </a:fld>
             <a:endParaRPr lang="en-US"/>
           </a:p>
@@ -968,7 +1413,7 @@
           <a:p>
             <a:fld id="{E9965892-A207-314E-BD7B-266B1DC85234}" type="datetimeFigureOut">
               <a:rPr lang="en-US" smtClean="0"/>
-              <a:t>10/2/23</a:t>
+              <a:t>12/18/23</a:t>
             </a:fld>
             <a:endParaRPr lang="en-US"/>
           </a:p>
@@ -1243,7 +1688,7 @@
           <a:p>
             <a:fld id="{E9965892-A207-314E-BD7B-266B1DC85234}" type="datetimeFigureOut">
               <a:rPr lang="en-US" smtClean="0"/>
-              <a:t>10/2/23</a:t>
+              <a:t>12/18/23</a:t>
             </a:fld>
             <a:endParaRPr lang="en-US"/>
           </a:p>
@@ -1508,7 +1953,7 @@
           <a:p>
             <a:fld id="{E9965892-A207-314E-BD7B-266B1DC85234}" type="datetimeFigureOut">
               <a:rPr lang="en-US" smtClean="0"/>
-              <a:t>10/2/23</a:t>
+              <a:t>12/18/23</a:t>
             </a:fld>
             <a:endParaRPr lang="en-US"/>
           </a:p>
@@ -1920,7 +2365,7 @@
           <a:p>
             <a:fld id="{E9965892-A207-314E-BD7B-266B1DC85234}" type="datetimeFigureOut">
               <a:rPr lang="en-US" smtClean="0"/>
-              <a:t>10/2/23</a:t>
+              <a:t>12/18/23</a:t>
             </a:fld>
             <a:endParaRPr lang="en-US"/>
           </a:p>
@@ -2061,7 +2506,7 @@
           <a:p>
             <a:fld id="{E9965892-A207-314E-BD7B-266B1DC85234}" type="datetimeFigureOut">
               <a:rPr lang="en-US" smtClean="0"/>
-              <a:t>10/2/23</a:t>
+              <a:t>12/18/23</a:t>
             </a:fld>
             <a:endParaRPr lang="en-US"/>
           </a:p>
@@ -2174,7 +2619,7 @@
           <a:p>
             <a:fld id="{E9965892-A207-314E-BD7B-266B1DC85234}" type="datetimeFigureOut">
               <a:rPr lang="en-US" smtClean="0"/>
-              <a:t>10/2/23</a:t>
+              <a:t>12/18/23</a:t>
             </a:fld>
             <a:endParaRPr lang="en-US"/>
           </a:p>
@@ -2485,7 +2930,7 @@
           <a:p>
             <a:fld id="{E9965892-A207-314E-BD7B-266B1DC85234}" type="datetimeFigureOut">
               <a:rPr lang="en-US" smtClean="0"/>
-              <a:t>10/2/23</a:t>
+              <a:t>12/18/23</a:t>
             </a:fld>
             <a:endParaRPr lang="en-US"/>
           </a:p>
@@ -2773,7 +3218,7 @@
           <a:p>
             <a:fld id="{E9965892-A207-314E-BD7B-266B1DC85234}" type="datetimeFigureOut">
               <a:rPr lang="en-US" smtClean="0"/>
-              <a:t>10/2/23</a:t>
+              <a:t>12/18/23</a:t>
             </a:fld>
             <a:endParaRPr lang="en-US"/>
           </a:p>
@@ -3014,7 +3459,7 @@
           <a:p>
             <a:fld id="{E9965892-A207-314E-BD7B-266B1DC85234}" type="datetimeFigureOut">
               <a:rPr lang="en-US" smtClean="0"/>
-              <a:t>10/2/23</a:t>
+              <a:t>12/18/23</a:t>
             </a:fld>
             <a:endParaRPr lang="en-US"/>
           </a:p>
@@ -3483,126 +3928,13 @@
               </a:rPr>
               <a:t>functionPartition</a:t>
             </a:r>
-            <a:endParaRPr lang="en-US" sz="1600" b="1" dirty="0">
-              <a:solidFill>
-                <a:schemeClr val="tx1"/>
-              </a:solidFill>
-            </a:endParaRPr>
-          </a:p>
-        </p:txBody>
-      </p:sp>
-      <p:sp>
-        <p:nvSpPr>
-          <p:cNvPr id="28" name="Rectangle 27">
-            <a:extLst>
-              <a:ext uri="{FF2B5EF4-FFF2-40B4-BE49-F238E27FC236}">
-                <a16:creationId xmlns:a16="http://schemas.microsoft.com/office/drawing/2014/main" id="{76BDC4DA-A3D7-02DD-247D-B97C6C88EC9E}"/>
-              </a:ext>
-            </a:extLst>
-          </p:cNvPr>
-          <p:cNvSpPr/>
-          <p:nvPr/>
-        </p:nvSpPr>
-        <p:spPr>
-          <a:xfrm>
-            <a:off x="102744" y="4121236"/>
-            <a:ext cx="3175686" cy="2514341"/>
-          </a:xfrm>
-          <a:prstGeom prst="rect">
-            <a:avLst/>
-          </a:prstGeom>
-          <a:solidFill>
-            <a:schemeClr val="bg1"/>
-          </a:solidFill>
-        </p:spPr>
-        <p:style>
-          <a:lnRef idx="2">
-            <a:schemeClr val="accent1">
-              <a:shade val="15000"/>
-            </a:schemeClr>
-          </a:lnRef>
-          <a:fillRef idx="1">
-            <a:schemeClr val="accent1"/>
-          </a:fillRef>
-          <a:effectRef idx="0">
-            <a:schemeClr val="accent1"/>
-          </a:effectRef>
-          <a:fontRef idx="minor">
-            <a:schemeClr val="lt1"/>
-          </a:fontRef>
-        </p:style>
-        <p:txBody>
-          <a:bodyPr rtlCol="0" anchor="t" anchorCtr="0"/>
-          <a:lstStyle/>
-          <a:p>
-            <a:r>
-              <a:rPr lang="en-US" sz="1600" b="1" dirty="0" err="1">
+            <a:r>
+              <a:rPr lang="en-US" sz="1600" b="1" dirty="0">
                 <a:solidFill>
                   <a:schemeClr val="tx1"/>
                 </a:solidFill>
               </a:rPr>
-              <a:t>functionLoadSharedFiles</a:t>
-            </a:r>
-            <a:endParaRPr lang="en-US" sz="1600" b="1" dirty="0">
-              <a:solidFill>
-                <a:schemeClr val="tx1"/>
-              </a:solidFill>
-            </a:endParaRPr>
-          </a:p>
-        </p:txBody>
-      </p:sp>
-      <p:sp>
-        <p:nvSpPr>
-          <p:cNvPr id="14" name="Rectangle 13">
-            <a:extLst>
-              <a:ext uri="{FF2B5EF4-FFF2-40B4-BE49-F238E27FC236}">
-                <a16:creationId xmlns:a16="http://schemas.microsoft.com/office/drawing/2014/main" id="{33BE3399-B9D4-3918-F7BB-0DCF57098BF5}"/>
-              </a:ext>
-            </a:extLst>
-          </p:cNvPr>
-          <p:cNvSpPr/>
-          <p:nvPr/>
-        </p:nvSpPr>
-        <p:spPr>
-          <a:xfrm>
-            <a:off x="829450" y="1941369"/>
-            <a:ext cx="1722273" cy="1975113"/>
-          </a:xfrm>
-          <a:prstGeom prst="rect">
-            <a:avLst/>
-          </a:prstGeom>
-        </p:spPr>
-        <p:style>
-          <a:lnRef idx="2">
-            <a:schemeClr val="accent1">
-              <a:shade val="15000"/>
-            </a:schemeClr>
-          </a:lnRef>
-          <a:fillRef idx="1">
-            <a:schemeClr val="accent1"/>
-          </a:fillRef>
-          <a:effectRef idx="0">
-            <a:schemeClr val="accent1"/>
-          </a:effectRef>
-          <a:fontRef idx="minor">
-            <a:schemeClr val="lt1"/>
-          </a:fontRef>
-        </p:style>
-        <p:txBody>
-          <a:bodyPr rtlCol="0" anchor="t" anchorCtr="0"/>
-          <a:lstStyle/>
-          <a:p>
-            <a:pPr algn="ctr"/>
-            <a:r>
-              <a:rPr lang="en-US" sz="1600" b="1" dirty="0"/>
-              <a:t>(A5)</a:t>
-            </a:r>
-          </a:p>
-          <a:p>
-            <a:pPr algn="ctr"/>
-            <a:r>
-              <a:rPr lang="en-US" sz="1600" b="1" dirty="0"/>
-              <a:t>Model Selection</a:t>
+              <a:t> (Problem Specific Options)</a:t>
             </a:r>
           </a:p>
         </p:txBody>
@@ -3691,359 +4023,213 @@
           </a:p>
         </p:txBody>
       </p:sp>
-      <p:sp>
-        <p:nvSpPr>
-          <p:cNvPr id="5" name="TextBox 4">
-            <a:extLst>
-              <a:ext uri="{FF2B5EF4-FFF2-40B4-BE49-F238E27FC236}">
-                <a16:creationId xmlns:a16="http://schemas.microsoft.com/office/drawing/2014/main" id="{3E08B684-96E6-510E-3B6D-B25085E828D3}"/>
-              </a:ext>
-            </a:extLst>
-          </p:cNvPr>
-          <p:cNvSpPr txBox="1"/>
+      <p:grpSp>
+        <p:nvGrpSpPr>
+          <p:cNvPr id="8" name="Group 7">
+            <a:extLst>
+              <a:ext uri="{FF2B5EF4-FFF2-40B4-BE49-F238E27FC236}">
+                <a16:creationId xmlns:a16="http://schemas.microsoft.com/office/drawing/2014/main" id="{70339C0D-069D-82E1-AE0C-64C4CD4080C5}"/>
+              </a:ext>
+            </a:extLst>
+          </p:cNvPr>
+          <p:cNvGrpSpPr/>
           <p:nvPr/>
-        </p:nvSpPr>
-        <p:spPr>
+        </p:nvGrpSpPr>
+        <p:grpSpPr>
           <a:xfrm>
-            <a:off x="926758" y="2769743"/>
-            <a:ext cx="1525963" cy="338554"/>
+            <a:off x="218397" y="1667818"/>
+            <a:ext cx="1722273" cy="1975113"/>
+            <a:chOff x="829450" y="1941369"/>
+            <a:chExt cx="1722273" cy="1975113"/>
           </a:xfrm>
-          <a:prstGeom prst="rect">
-            <a:avLst/>
-          </a:prstGeom>
-          <a:ln>
-            <a:solidFill>
+        </p:grpSpPr>
+        <p:sp>
+          <p:nvSpPr>
+            <p:cNvPr id="14" name="Rectangle 13">
+              <a:extLst>
+                <a:ext uri="{FF2B5EF4-FFF2-40B4-BE49-F238E27FC236}">
+                  <a16:creationId xmlns:a16="http://schemas.microsoft.com/office/drawing/2014/main" id="{33BE3399-B9D4-3918-F7BB-0DCF57098BF5}"/>
+                </a:ext>
+              </a:extLst>
+            </p:cNvPr>
+            <p:cNvSpPr/>
+            <p:nvPr/>
+          </p:nvSpPr>
+          <p:spPr>
+            <a:xfrm>
+              <a:off x="829450" y="1941369"/>
+              <a:ext cx="1722273" cy="1975113"/>
+            </a:xfrm>
+            <a:prstGeom prst="rect">
+              <a:avLst/>
+            </a:prstGeom>
+          </p:spPr>
+          <p:style>
+            <a:lnRef idx="2">
+              <a:schemeClr val="accent1">
+                <a:shade val="15000"/>
+              </a:schemeClr>
+            </a:lnRef>
+            <a:fillRef idx="1">
               <a:schemeClr val="accent1"/>
-            </a:solidFill>
-          </a:ln>
-        </p:spPr>
-        <p:style>
-          <a:lnRef idx="2">
-            <a:schemeClr val="accent6"/>
-          </a:lnRef>
-          <a:fillRef idx="1">
-            <a:schemeClr val="lt1"/>
-          </a:fillRef>
-          <a:effectRef idx="0">
-            <a:schemeClr val="accent6"/>
-          </a:effectRef>
-          <a:fontRef idx="minor">
-            <a:schemeClr val="dk1"/>
-          </a:fontRef>
-        </p:style>
-        <p:txBody>
-          <a:bodyPr wrap="square" rtlCol="0">
-            <a:spAutoFit/>
-          </a:bodyPr>
-          <a:lstStyle/>
-          <a:p>
-            <a:r>
-              <a:rPr lang="en-US" sz="1600" dirty="0" err="1">
-                <a:solidFill>
-                  <a:schemeClr val="accent1"/>
-                </a:solidFill>
-              </a:rPr>
-              <a:t>LazyAlg</a:t>
-            </a:r>
-            <a:r>
-              <a:rPr lang="en-US" sz="1600" dirty="0">
-                <a:solidFill>
-                  <a:schemeClr val="accent1"/>
-                </a:solidFill>
-              </a:rPr>
-              <a:t> (A5=1)x</a:t>
-            </a:r>
-          </a:p>
-        </p:txBody>
-      </p:sp>
-      <p:sp>
-        <p:nvSpPr>
-          <p:cNvPr id="6" name="TextBox 5">
-            <a:extLst>
-              <a:ext uri="{FF2B5EF4-FFF2-40B4-BE49-F238E27FC236}">
-                <a16:creationId xmlns:a16="http://schemas.microsoft.com/office/drawing/2014/main" id="{EA75AA5C-87C7-71C0-1DFD-DC148FBD7190}"/>
-              </a:ext>
-            </a:extLst>
-          </p:cNvPr>
-          <p:cNvSpPr txBox="1"/>
-          <p:nvPr/>
-        </p:nvSpPr>
-        <p:spPr>
-          <a:xfrm>
-            <a:off x="926758" y="3218128"/>
-            <a:ext cx="1525963" cy="338554"/>
-          </a:xfrm>
-          <a:prstGeom prst="rect">
-            <a:avLst/>
-          </a:prstGeom>
-          <a:ln>
-            <a:solidFill>
+            </a:fillRef>
+            <a:effectRef idx="0">
               <a:schemeClr val="accent1"/>
-            </a:solidFill>
-          </a:ln>
-        </p:spPr>
-        <p:style>
-          <a:lnRef idx="2">
-            <a:schemeClr val="accent6"/>
-          </a:lnRef>
-          <a:fillRef idx="1">
-            <a:schemeClr val="lt1"/>
-          </a:fillRef>
-          <a:effectRef idx="0">
-            <a:schemeClr val="accent6"/>
-          </a:effectRef>
-          <a:fontRef idx="minor">
-            <a:schemeClr val="dk1"/>
-          </a:fontRef>
-        </p:style>
-        <p:txBody>
-          <a:bodyPr wrap="square" rtlCol="0">
-            <a:spAutoFit/>
-          </a:bodyPr>
-          <a:lstStyle/>
-          <a:p>
-            <a:r>
-              <a:rPr lang="en-US" sz="1600" dirty="0" err="1">
-                <a:solidFill>
-                  <a:schemeClr val="accent1"/>
-                </a:solidFill>
-              </a:rPr>
-              <a:t>MainAlg</a:t>
-            </a:r>
-            <a:r>
-              <a:rPr lang="en-US" sz="1600" dirty="0">
-                <a:solidFill>
-                  <a:schemeClr val="accent1"/>
-                </a:solidFill>
-              </a:rPr>
-              <a:t> (A5=0)</a:t>
-            </a:r>
-          </a:p>
-        </p:txBody>
-      </p:sp>
-      <p:sp>
-        <p:nvSpPr>
-          <p:cNvPr id="9" name="TextBox 8">
-            <a:extLst>
-              <a:ext uri="{FF2B5EF4-FFF2-40B4-BE49-F238E27FC236}">
-                <a16:creationId xmlns:a16="http://schemas.microsoft.com/office/drawing/2014/main" id="{5602E791-4C70-306B-C88A-32BCBCC08FDF}"/>
-              </a:ext>
-            </a:extLst>
-          </p:cNvPr>
-          <p:cNvSpPr txBox="1"/>
-          <p:nvPr/>
-        </p:nvSpPr>
-        <p:spPr>
-          <a:xfrm>
-            <a:off x="436795" y="4815511"/>
-            <a:ext cx="1630567" cy="584775"/>
-          </a:xfrm>
-          <a:prstGeom prst="rect">
-            <a:avLst/>
-          </a:prstGeom>
-          <a:solidFill>
-            <a:schemeClr val="bg1"/>
-          </a:solidFill>
-          <a:ln>
-            <a:solidFill>
-              <a:schemeClr val="tx1"/>
-            </a:solidFill>
-          </a:ln>
-        </p:spPr>
-        <p:txBody>
-          <a:bodyPr wrap="square" rtlCol="0">
-            <a:spAutoFit/>
-          </a:bodyPr>
-          <a:lstStyle/>
-          <a:p>
-            <a:r>
-              <a:rPr lang="en-US" sz="1600" dirty="0" err="1"/>
-              <a:t>functionGbound</a:t>
-            </a:r>
-            <a:endParaRPr lang="en-US" sz="1600" dirty="0"/>
-          </a:p>
-          <a:p>
-            <a:r>
-              <a:rPr lang="en-US" sz="1600" dirty="0" err="1"/>
-              <a:t>functionHbound</a:t>
-            </a:r>
-            <a:endParaRPr lang="en-US" sz="1600" dirty="0"/>
-          </a:p>
-        </p:txBody>
-      </p:sp>
-      <p:sp>
-        <p:nvSpPr>
-          <p:cNvPr id="10" name="TextBox 9">
-            <a:extLst>
-              <a:ext uri="{FF2B5EF4-FFF2-40B4-BE49-F238E27FC236}">
-                <a16:creationId xmlns:a16="http://schemas.microsoft.com/office/drawing/2014/main" id="{5687B32F-44F9-690C-8CF7-05DD1A4EBFF1}"/>
-              </a:ext>
-            </a:extLst>
-          </p:cNvPr>
-          <p:cNvSpPr txBox="1"/>
-          <p:nvPr/>
-        </p:nvSpPr>
-        <p:spPr>
-          <a:xfrm>
-            <a:off x="435762" y="4437301"/>
-            <a:ext cx="2019300" cy="338554"/>
-          </a:xfrm>
-          <a:prstGeom prst="rect">
-            <a:avLst/>
-          </a:prstGeom>
-          <a:solidFill>
-            <a:schemeClr val="bg1"/>
-          </a:solidFill>
-          <a:ln>
-            <a:solidFill>
-              <a:schemeClr val="tx1"/>
-            </a:solidFill>
-          </a:ln>
-        </p:spPr>
-        <p:txBody>
-          <a:bodyPr wrap="square" rtlCol="0">
-            <a:spAutoFit/>
-          </a:bodyPr>
-          <a:lstStyle/>
-          <a:p>
-            <a:r>
-              <a:rPr lang="en-US" sz="1600" dirty="0" err="1"/>
-              <a:t>functionGetCellInfo</a:t>
-            </a:r>
-            <a:endParaRPr lang="en-US" sz="1600" dirty="0"/>
-          </a:p>
-        </p:txBody>
-      </p:sp>
-      <p:sp>
-        <p:nvSpPr>
-          <p:cNvPr id="11" name="TextBox 10">
-            <a:extLst>
-              <a:ext uri="{FF2B5EF4-FFF2-40B4-BE49-F238E27FC236}">
-                <a16:creationId xmlns:a16="http://schemas.microsoft.com/office/drawing/2014/main" id="{1CCB6B52-FD67-427E-28BB-190CF178CB84}"/>
-              </a:ext>
-            </a:extLst>
-          </p:cNvPr>
-          <p:cNvSpPr txBox="1"/>
-          <p:nvPr/>
-        </p:nvSpPr>
-        <p:spPr>
-          <a:xfrm>
-            <a:off x="435762" y="5454019"/>
-            <a:ext cx="2358189" cy="338554"/>
-          </a:xfrm>
-          <a:prstGeom prst="rect">
-            <a:avLst/>
-          </a:prstGeom>
-          <a:ln>
-            <a:solidFill>
-              <a:schemeClr val="accent1"/>
-            </a:solidFill>
-          </a:ln>
-        </p:spPr>
-        <p:style>
-          <a:lnRef idx="2">
-            <a:schemeClr val="accent1"/>
-          </a:lnRef>
-          <a:fillRef idx="1">
-            <a:schemeClr val="lt1"/>
-          </a:fillRef>
-          <a:effectRef idx="0">
-            <a:schemeClr val="accent1"/>
-          </a:effectRef>
-          <a:fontRef idx="minor">
-            <a:schemeClr val="dk1"/>
-          </a:fontRef>
-        </p:style>
-        <p:txBody>
-          <a:bodyPr wrap="square" rtlCol="0">
-            <a:spAutoFit/>
-          </a:bodyPr>
-          <a:lstStyle/>
-          <a:p>
-            <a:r>
-              <a:rPr lang="en-US" sz="1600" dirty="0" err="1">
-                <a:solidFill>
-                  <a:schemeClr val="accent1"/>
-                </a:solidFill>
-              </a:rPr>
-              <a:t>functionSelectArc</a:t>
-            </a:r>
-            <a:r>
-              <a:rPr lang="en-US" sz="1600" dirty="0">
-                <a:solidFill>
-                  <a:schemeClr val="accent1"/>
-                </a:solidFill>
-              </a:rPr>
-              <a:t> (A1)</a:t>
-            </a:r>
-          </a:p>
-        </p:txBody>
-      </p:sp>
-      <p:sp>
-        <p:nvSpPr>
-          <p:cNvPr id="12" name="TextBox 11">
-            <a:extLst>
-              <a:ext uri="{FF2B5EF4-FFF2-40B4-BE49-F238E27FC236}">
-                <a16:creationId xmlns:a16="http://schemas.microsoft.com/office/drawing/2014/main" id="{221C9D0C-4DAE-CF77-56CA-02A7B1B0E7F7}"/>
-              </a:ext>
-            </a:extLst>
-          </p:cNvPr>
-          <p:cNvSpPr txBox="1"/>
-          <p:nvPr/>
-        </p:nvSpPr>
-        <p:spPr>
-          <a:xfrm>
-            <a:off x="433421" y="5848981"/>
-            <a:ext cx="2368386" cy="338554"/>
-          </a:xfrm>
-          <a:prstGeom prst="rect">
-            <a:avLst/>
-          </a:prstGeom>
-          <a:ln>
-            <a:solidFill>
-              <a:schemeClr val="accent1"/>
-            </a:solidFill>
-          </a:ln>
-        </p:spPr>
-        <p:style>
-          <a:lnRef idx="2">
-            <a:schemeClr val="accent1"/>
-          </a:lnRef>
-          <a:fillRef idx="1">
-            <a:schemeClr val="lt1"/>
-          </a:fillRef>
-          <a:effectRef idx="0">
-            <a:schemeClr val="accent1"/>
-          </a:effectRef>
-          <a:fontRef idx="minor">
-            <a:schemeClr val="dk1"/>
-          </a:fontRef>
-        </p:style>
-        <p:txBody>
-          <a:bodyPr wrap="square" rtlCol="0">
-            <a:spAutoFit/>
-          </a:bodyPr>
-          <a:lstStyle/>
-          <a:p>
-            <a:r>
-              <a:rPr lang="en-US" sz="1600" dirty="0" err="1">
-                <a:solidFill>
-                  <a:schemeClr val="accent1"/>
-                </a:solidFill>
-              </a:rPr>
-              <a:t>functionArcSplit</a:t>
-            </a:r>
-            <a:r>
-              <a:rPr lang="en-US" sz="1600" dirty="0">
-                <a:solidFill>
-                  <a:schemeClr val="accent1"/>
-                </a:solidFill>
-              </a:rPr>
-              <a:t> (A3)</a:t>
-            </a:r>
-          </a:p>
-        </p:txBody>
-      </p:sp>
+            </a:effectRef>
+            <a:fontRef idx="minor">
+              <a:schemeClr val="lt1"/>
+            </a:fontRef>
+          </p:style>
+          <p:txBody>
+            <a:bodyPr rtlCol="0" anchor="t" anchorCtr="0"/>
+            <a:lstStyle/>
+            <a:p>
+              <a:pPr algn="ctr"/>
+              <a:r>
+                <a:rPr lang="en-US" sz="1600" b="1" dirty="0"/>
+                <a:t>(A5)</a:t>
+              </a:r>
+            </a:p>
+            <a:p>
+              <a:pPr algn="ctr"/>
+              <a:r>
+                <a:rPr lang="en-US" sz="1600" b="1" dirty="0"/>
+                <a:t>Model Selection</a:t>
+              </a:r>
+            </a:p>
+          </p:txBody>
+        </p:sp>
+        <p:sp>
+          <p:nvSpPr>
+            <p:cNvPr id="5" name="TextBox 4">
+              <a:extLst>
+                <a:ext uri="{FF2B5EF4-FFF2-40B4-BE49-F238E27FC236}">
+                  <a16:creationId xmlns:a16="http://schemas.microsoft.com/office/drawing/2014/main" id="{3E08B684-96E6-510E-3B6D-B25085E828D3}"/>
+                </a:ext>
+              </a:extLst>
+            </p:cNvPr>
+            <p:cNvSpPr txBox="1"/>
+            <p:nvPr/>
+          </p:nvSpPr>
+          <p:spPr>
+            <a:xfrm>
+              <a:off x="926758" y="2769743"/>
+              <a:ext cx="1525963" cy="338554"/>
+            </a:xfrm>
+            <a:prstGeom prst="rect">
+              <a:avLst/>
+            </a:prstGeom>
+            <a:ln>
+              <a:solidFill>
+                <a:schemeClr val="accent1"/>
+              </a:solidFill>
+            </a:ln>
+          </p:spPr>
+          <p:style>
+            <a:lnRef idx="2">
+              <a:schemeClr val="accent6"/>
+            </a:lnRef>
+            <a:fillRef idx="1">
+              <a:schemeClr val="lt1"/>
+            </a:fillRef>
+            <a:effectRef idx="0">
+              <a:schemeClr val="accent6"/>
+            </a:effectRef>
+            <a:fontRef idx="minor">
+              <a:schemeClr val="dk1"/>
+            </a:fontRef>
+          </p:style>
+          <p:txBody>
+            <a:bodyPr wrap="square" rtlCol="0">
+              <a:spAutoFit/>
+            </a:bodyPr>
+            <a:lstStyle/>
+            <a:p>
+              <a:r>
+                <a:rPr lang="en-US" sz="1600" dirty="0" err="1">
+                  <a:solidFill>
+                    <a:schemeClr val="accent1"/>
+                  </a:solidFill>
+                </a:rPr>
+                <a:t>LazyAlg</a:t>
+              </a:r>
+              <a:r>
+                <a:rPr lang="en-US" sz="1600" dirty="0">
+                  <a:solidFill>
+                    <a:schemeClr val="accent1"/>
+                  </a:solidFill>
+                </a:rPr>
+                <a:t> (A5=1)</a:t>
+              </a:r>
+            </a:p>
+          </p:txBody>
+        </p:sp>
+        <p:sp>
+          <p:nvSpPr>
+            <p:cNvPr id="6" name="TextBox 5">
+              <a:extLst>
+                <a:ext uri="{FF2B5EF4-FFF2-40B4-BE49-F238E27FC236}">
+                  <a16:creationId xmlns:a16="http://schemas.microsoft.com/office/drawing/2014/main" id="{EA75AA5C-87C7-71C0-1DFD-DC148FBD7190}"/>
+                </a:ext>
+              </a:extLst>
+            </p:cNvPr>
+            <p:cNvSpPr txBox="1"/>
+            <p:nvPr/>
+          </p:nvSpPr>
+          <p:spPr>
+            <a:xfrm>
+              <a:off x="926758" y="3218128"/>
+              <a:ext cx="1525963" cy="338554"/>
+            </a:xfrm>
+            <a:prstGeom prst="rect">
+              <a:avLst/>
+            </a:prstGeom>
+            <a:ln>
+              <a:solidFill>
+                <a:schemeClr val="accent1"/>
+              </a:solidFill>
+            </a:ln>
+          </p:spPr>
+          <p:style>
+            <a:lnRef idx="2">
+              <a:schemeClr val="accent6"/>
+            </a:lnRef>
+            <a:fillRef idx="1">
+              <a:schemeClr val="lt1"/>
+            </a:fillRef>
+            <a:effectRef idx="0">
+              <a:schemeClr val="accent6"/>
+            </a:effectRef>
+            <a:fontRef idx="minor">
+              <a:schemeClr val="dk1"/>
+            </a:fontRef>
+          </p:style>
+          <p:txBody>
+            <a:bodyPr wrap="square" rtlCol="0">
+              <a:spAutoFit/>
+            </a:bodyPr>
+            <a:lstStyle/>
+            <a:p>
+              <a:r>
+                <a:rPr lang="en-US" sz="1600" dirty="0" err="1">
+                  <a:solidFill>
+                    <a:schemeClr val="accent1"/>
+                  </a:solidFill>
+                </a:rPr>
+                <a:t>MainAlg</a:t>
+              </a:r>
+              <a:r>
+                <a:rPr lang="en-US" sz="1600" dirty="0">
+                  <a:solidFill>
+                    <a:schemeClr val="accent1"/>
+                  </a:solidFill>
+                </a:rPr>
+                <a:t> (A5=0)</a:t>
+              </a:r>
+            </a:p>
+          </p:txBody>
+        </p:sp>
+      </p:grpSp>
       <p:sp>
         <p:nvSpPr>
           <p:cNvPr id="15" name="Rectangle 14">
@@ -4378,8 +4564,8 @@
         </p:nvSpPr>
         <p:spPr>
           <a:xfrm>
-            <a:off x="595690" y="1434679"/>
-            <a:ext cx="10636602" cy="467790"/>
+            <a:off x="2660301" y="1433923"/>
+            <a:ext cx="8367242" cy="467790"/>
           </a:xfrm>
           <a:prstGeom prst="rightArrow">
             <a:avLst/>
@@ -4666,8 +4852,8 @@
         </p:nvCxnSpPr>
         <p:spPr>
           <a:xfrm flipV="1">
-            <a:off x="1690587" y="3916482"/>
-            <a:ext cx="0" cy="204754"/>
+            <a:off x="829450" y="3642931"/>
+            <a:ext cx="250084" cy="1297548"/>
           </a:xfrm>
           <a:prstGeom prst="straightConnector1">
             <a:avLst/>
@@ -4691,12 +4877,363 @@
           </a:fontRef>
         </p:style>
       </p:cxnSp>
-      <p:sp>
-        <p:nvSpPr>
-          <p:cNvPr id="34" name="TextBox 33">
-            <a:extLst>
-              <a:ext uri="{FF2B5EF4-FFF2-40B4-BE49-F238E27FC236}">
-                <a16:creationId xmlns:a16="http://schemas.microsoft.com/office/drawing/2014/main" id="{877ABEFD-A08C-EF4F-58B8-81D9F4A5D0B4}"/>
+      <p:grpSp>
+        <p:nvGrpSpPr>
+          <p:cNvPr id="3" name="Group 2">
+            <a:extLst>
+              <a:ext uri="{FF2B5EF4-FFF2-40B4-BE49-F238E27FC236}">
+                <a16:creationId xmlns:a16="http://schemas.microsoft.com/office/drawing/2014/main" id="{6B919D79-13CB-BD8A-9D8E-885235BB3A90}"/>
+              </a:ext>
+            </a:extLst>
+          </p:cNvPr>
+          <p:cNvGrpSpPr/>
+          <p:nvPr/>
+        </p:nvGrpSpPr>
+        <p:grpSpPr>
+          <a:xfrm>
+            <a:off x="-758393" y="4940479"/>
+            <a:ext cx="3175686" cy="2514341"/>
+            <a:chOff x="102744" y="4121236"/>
+            <a:chExt cx="3175686" cy="2514341"/>
+          </a:xfrm>
+        </p:grpSpPr>
+        <p:sp>
+          <p:nvSpPr>
+            <p:cNvPr id="28" name="Rectangle 27">
+              <a:extLst>
+                <a:ext uri="{FF2B5EF4-FFF2-40B4-BE49-F238E27FC236}">
+                  <a16:creationId xmlns:a16="http://schemas.microsoft.com/office/drawing/2014/main" id="{76BDC4DA-A3D7-02DD-247D-B97C6C88EC9E}"/>
+                </a:ext>
+              </a:extLst>
+            </p:cNvPr>
+            <p:cNvSpPr/>
+            <p:nvPr/>
+          </p:nvSpPr>
+          <p:spPr>
+            <a:xfrm>
+              <a:off x="102744" y="4121236"/>
+              <a:ext cx="3175686" cy="2514341"/>
+            </a:xfrm>
+            <a:prstGeom prst="rect">
+              <a:avLst/>
+            </a:prstGeom>
+            <a:solidFill>
+              <a:schemeClr val="bg1"/>
+            </a:solidFill>
+          </p:spPr>
+          <p:style>
+            <a:lnRef idx="2">
+              <a:schemeClr val="accent1">
+                <a:shade val="15000"/>
+              </a:schemeClr>
+            </a:lnRef>
+            <a:fillRef idx="1">
+              <a:schemeClr val="accent1"/>
+            </a:fillRef>
+            <a:effectRef idx="0">
+              <a:schemeClr val="accent1"/>
+            </a:effectRef>
+            <a:fontRef idx="minor">
+              <a:schemeClr val="lt1"/>
+            </a:fontRef>
+          </p:style>
+          <p:txBody>
+            <a:bodyPr rtlCol="0" anchor="t" anchorCtr="0"/>
+            <a:lstStyle/>
+            <a:p>
+              <a:r>
+                <a:rPr lang="en-US" sz="1600" b="1" dirty="0" err="1">
+                  <a:solidFill>
+                    <a:schemeClr val="tx1"/>
+                  </a:solidFill>
+                </a:rPr>
+                <a:t>functionLoadSharedFiles</a:t>
+              </a:r>
+              <a:endParaRPr lang="en-US" sz="1600" b="1" dirty="0">
+                <a:solidFill>
+                  <a:schemeClr val="tx1"/>
+                </a:solidFill>
+              </a:endParaRPr>
+            </a:p>
+          </p:txBody>
+        </p:sp>
+        <p:sp>
+          <p:nvSpPr>
+            <p:cNvPr id="9" name="TextBox 8">
+              <a:extLst>
+                <a:ext uri="{FF2B5EF4-FFF2-40B4-BE49-F238E27FC236}">
+                  <a16:creationId xmlns:a16="http://schemas.microsoft.com/office/drawing/2014/main" id="{5602E791-4C70-306B-C88A-32BCBCC08FDF}"/>
+                </a:ext>
+              </a:extLst>
+            </p:cNvPr>
+            <p:cNvSpPr txBox="1"/>
+            <p:nvPr/>
+          </p:nvSpPr>
+          <p:spPr>
+            <a:xfrm>
+              <a:off x="436795" y="4815511"/>
+              <a:ext cx="1630567" cy="584775"/>
+            </a:xfrm>
+            <a:prstGeom prst="rect">
+              <a:avLst/>
+            </a:prstGeom>
+            <a:solidFill>
+              <a:schemeClr val="bg1"/>
+            </a:solidFill>
+            <a:ln>
+              <a:solidFill>
+                <a:schemeClr val="tx1"/>
+              </a:solidFill>
+            </a:ln>
+          </p:spPr>
+          <p:txBody>
+            <a:bodyPr wrap="square" rtlCol="0">
+              <a:spAutoFit/>
+            </a:bodyPr>
+            <a:lstStyle/>
+            <a:p>
+              <a:r>
+                <a:rPr lang="en-US" sz="1600" dirty="0" err="1"/>
+                <a:t>functionGbound</a:t>
+              </a:r>
+              <a:endParaRPr lang="en-US" sz="1600" dirty="0"/>
+            </a:p>
+            <a:p>
+              <a:r>
+                <a:rPr lang="en-US" sz="1600" dirty="0" err="1"/>
+                <a:t>functionHbound</a:t>
+              </a:r>
+              <a:endParaRPr lang="en-US" sz="1600" dirty="0"/>
+            </a:p>
+          </p:txBody>
+        </p:sp>
+        <p:sp>
+          <p:nvSpPr>
+            <p:cNvPr id="10" name="TextBox 9">
+              <a:extLst>
+                <a:ext uri="{FF2B5EF4-FFF2-40B4-BE49-F238E27FC236}">
+                  <a16:creationId xmlns:a16="http://schemas.microsoft.com/office/drawing/2014/main" id="{5687B32F-44F9-690C-8CF7-05DD1A4EBFF1}"/>
+                </a:ext>
+              </a:extLst>
+            </p:cNvPr>
+            <p:cNvSpPr txBox="1"/>
+            <p:nvPr/>
+          </p:nvSpPr>
+          <p:spPr>
+            <a:xfrm>
+              <a:off x="435762" y="4437301"/>
+              <a:ext cx="2019300" cy="338554"/>
+            </a:xfrm>
+            <a:prstGeom prst="rect">
+              <a:avLst/>
+            </a:prstGeom>
+            <a:solidFill>
+              <a:schemeClr val="bg1"/>
+            </a:solidFill>
+            <a:ln>
+              <a:solidFill>
+                <a:schemeClr val="tx1"/>
+              </a:solidFill>
+            </a:ln>
+          </p:spPr>
+          <p:txBody>
+            <a:bodyPr wrap="square" rtlCol="0">
+              <a:spAutoFit/>
+            </a:bodyPr>
+            <a:lstStyle/>
+            <a:p>
+              <a:r>
+                <a:rPr lang="en-US" sz="1600" dirty="0" err="1"/>
+                <a:t>functionGetCellInfo</a:t>
+              </a:r>
+              <a:endParaRPr lang="en-US" sz="1600" dirty="0"/>
+            </a:p>
+          </p:txBody>
+        </p:sp>
+        <p:sp>
+          <p:nvSpPr>
+            <p:cNvPr id="11" name="TextBox 10">
+              <a:extLst>
+                <a:ext uri="{FF2B5EF4-FFF2-40B4-BE49-F238E27FC236}">
+                  <a16:creationId xmlns:a16="http://schemas.microsoft.com/office/drawing/2014/main" id="{1CCB6B52-FD67-427E-28BB-190CF178CB84}"/>
+                </a:ext>
+              </a:extLst>
+            </p:cNvPr>
+            <p:cNvSpPr txBox="1"/>
+            <p:nvPr/>
+          </p:nvSpPr>
+          <p:spPr>
+            <a:xfrm>
+              <a:off x="435762" y="5454019"/>
+              <a:ext cx="2358189" cy="338554"/>
+            </a:xfrm>
+            <a:prstGeom prst="rect">
+              <a:avLst/>
+            </a:prstGeom>
+            <a:ln>
+              <a:solidFill>
+                <a:schemeClr val="accent1"/>
+              </a:solidFill>
+            </a:ln>
+          </p:spPr>
+          <p:style>
+            <a:lnRef idx="2">
+              <a:schemeClr val="accent1"/>
+            </a:lnRef>
+            <a:fillRef idx="1">
+              <a:schemeClr val="lt1"/>
+            </a:fillRef>
+            <a:effectRef idx="0">
+              <a:schemeClr val="accent1"/>
+            </a:effectRef>
+            <a:fontRef idx="minor">
+              <a:schemeClr val="dk1"/>
+            </a:fontRef>
+          </p:style>
+          <p:txBody>
+            <a:bodyPr wrap="square" rtlCol="0">
+              <a:spAutoFit/>
+            </a:bodyPr>
+            <a:lstStyle/>
+            <a:p>
+              <a:r>
+                <a:rPr lang="en-US" sz="1600" dirty="0" err="1">
+                  <a:solidFill>
+                    <a:schemeClr val="accent1"/>
+                  </a:solidFill>
+                </a:rPr>
+                <a:t>functionSelectArc</a:t>
+              </a:r>
+              <a:r>
+                <a:rPr lang="en-US" sz="1600" dirty="0">
+                  <a:solidFill>
+                    <a:schemeClr val="accent1"/>
+                  </a:solidFill>
+                </a:rPr>
+                <a:t> (A1)</a:t>
+              </a:r>
+            </a:p>
+          </p:txBody>
+        </p:sp>
+        <p:sp>
+          <p:nvSpPr>
+            <p:cNvPr id="12" name="TextBox 11">
+              <a:extLst>
+                <a:ext uri="{FF2B5EF4-FFF2-40B4-BE49-F238E27FC236}">
+                  <a16:creationId xmlns:a16="http://schemas.microsoft.com/office/drawing/2014/main" id="{221C9D0C-4DAE-CF77-56CA-02A7B1B0E7F7}"/>
+                </a:ext>
+              </a:extLst>
+            </p:cNvPr>
+            <p:cNvSpPr txBox="1"/>
+            <p:nvPr/>
+          </p:nvSpPr>
+          <p:spPr>
+            <a:xfrm>
+              <a:off x="433421" y="5848981"/>
+              <a:ext cx="2368386" cy="338554"/>
+            </a:xfrm>
+            <a:prstGeom prst="rect">
+              <a:avLst/>
+            </a:prstGeom>
+            <a:ln>
+              <a:solidFill>
+                <a:schemeClr val="accent1"/>
+              </a:solidFill>
+            </a:ln>
+          </p:spPr>
+          <p:style>
+            <a:lnRef idx="2">
+              <a:schemeClr val="accent1"/>
+            </a:lnRef>
+            <a:fillRef idx="1">
+              <a:schemeClr val="lt1"/>
+            </a:fillRef>
+            <a:effectRef idx="0">
+              <a:schemeClr val="accent1"/>
+            </a:effectRef>
+            <a:fontRef idx="minor">
+              <a:schemeClr val="dk1"/>
+            </a:fontRef>
+          </p:style>
+          <p:txBody>
+            <a:bodyPr wrap="square" rtlCol="0">
+              <a:spAutoFit/>
+            </a:bodyPr>
+            <a:lstStyle/>
+            <a:p>
+              <a:r>
+                <a:rPr lang="en-US" sz="1600" dirty="0" err="1">
+                  <a:solidFill>
+                    <a:schemeClr val="accent1"/>
+                  </a:solidFill>
+                </a:rPr>
+                <a:t>functionArcSplit</a:t>
+              </a:r>
+              <a:r>
+                <a:rPr lang="en-US" sz="1600" dirty="0">
+                  <a:solidFill>
+                    <a:schemeClr val="accent1"/>
+                  </a:solidFill>
+                </a:rPr>
+                <a:t> (A3)</a:t>
+              </a:r>
+            </a:p>
+          </p:txBody>
+        </p:sp>
+        <p:sp>
+          <p:nvSpPr>
+            <p:cNvPr id="34" name="TextBox 33">
+              <a:extLst>
+                <a:ext uri="{FF2B5EF4-FFF2-40B4-BE49-F238E27FC236}">
+                  <a16:creationId xmlns:a16="http://schemas.microsoft.com/office/drawing/2014/main" id="{877ABEFD-A08C-EF4F-58B8-81D9F4A5D0B4}"/>
+                </a:ext>
+              </a:extLst>
+            </p:cNvPr>
+            <p:cNvSpPr txBox="1"/>
+            <p:nvPr/>
+          </p:nvSpPr>
+          <p:spPr>
+            <a:xfrm>
+              <a:off x="433421" y="6236598"/>
+              <a:ext cx="2019300" cy="338554"/>
+            </a:xfrm>
+            <a:prstGeom prst="rect">
+              <a:avLst/>
+            </a:prstGeom>
+            <a:solidFill>
+              <a:schemeClr val="bg1"/>
+            </a:solidFill>
+            <a:ln>
+              <a:solidFill>
+                <a:schemeClr val="tx1"/>
+              </a:solidFill>
+            </a:ln>
+          </p:spPr>
+          <p:txBody>
+            <a:bodyPr wrap="square" rtlCol="0">
+              <a:spAutoFit/>
+            </a:bodyPr>
+            <a:lstStyle/>
+            <a:p>
+              <a:r>
+                <a:rPr lang="en-US" sz="1600" dirty="0" err="1">
+                  <a:solidFill>
+                    <a:schemeClr val="tx1"/>
+                  </a:solidFill>
+                </a:rPr>
+                <a:t>functionPartition</a:t>
+              </a:r>
+              <a:endParaRPr lang="en-US" sz="1600" dirty="0"/>
+            </a:p>
+          </p:txBody>
+        </p:sp>
+      </p:grpSp>
+      <p:sp>
+        <p:nvSpPr>
+          <p:cNvPr id="13" name="TextBox 12">
+            <a:extLst>
+              <a:ext uri="{FF2B5EF4-FFF2-40B4-BE49-F238E27FC236}">
+                <a16:creationId xmlns:a16="http://schemas.microsoft.com/office/drawing/2014/main" id="{15F16C08-476D-5C1B-8D6F-4677835DA6A4}"/>
               </a:ext>
             </a:extLst>
           </p:cNvPr>
@@ -4705,20 +5242,48 @@
         </p:nvSpPr>
         <p:spPr>
           <a:xfrm>
-            <a:off x="433421" y="6236598"/>
-            <a:ext cx="2019300" cy="338554"/>
+            <a:off x="2790092" y="4185138"/>
+            <a:ext cx="2507866" cy="369332"/>
           </a:xfrm>
           <a:prstGeom prst="rect">
             <a:avLst/>
           </a:prstGeom>
-          <a:solidFill>
-            <a:schemeClr val="bg1"/>
-          </a:solidFill>
-          <a:ln>
-            <a:solidFill>
-              <a:schemeClr val="tx1"/>
-            </a:solidFill>
-          </a:ln>
+          <a:noFill/>
+        </p:spPr>
+        <p:txBody>
+          <a:bodyPr wrap="none" rtlCol="0">
+            <a:spAutoFit/>
+          </a:bodyPr>
+          <a:lstStyle/>
+          <a:p>
+            <a:r>
+              <a:rPr lang="en-US" dirty="0"/>
+              <a:t>(Computational Options)</a:t>
+            </a:r>
+          </a:p>
+        </p:txBody>
+      </p:sp>
+      <p:sp>
+        <p:nvSpPr>
+          <p:cNvPr id="23" name="TextBox 22">
+            <a:extLst>
+              <a:ext uri="{FF2B5EF4-FFF2-40B4-BE49-F238E27FC236}">
+                <a16:creationId xmlns:a16="http://schemas.microsoft.com/office/drawing/2014/main" id="{6C220BC0-885B-F2FF-86DB-74BEA14D6F90}"/>
+              </a:ext>
+            </a:extLst>
+          </p:cNvPr>
+          <p:cNvSpPr txBox="1"/>
+          <p:nvPr/>
+        </p:nvSpPr>
+        <p:spPr>
+          <a:xfrm>
+            <a:off x="4829909" y="4698729"/>
+            <a:ext cx="6670430" cy="646331"/>
+          </a:xfrm>
+          <a:prstGeom prst="rect">
+            <a:avLst/>
+          </a:prstGeom>
+          <a:noFill/>
         </p:spPr>
         <p:txBody>
           <a:bodyPr wrap="square" rtlCol="0">
@@ -4727,14 +5292,9 @@
           <a:lstStyle/>
           <a:p>
             <a:r>
-              <a:rPr lang="en-US" sz="1600" dirty="0" err="1">
-                <a:solidFill>
-                  <a:schemeClr val="tx1"/>
-                </a:solidFill>
-              </a:rPr>
-              <a:t>functionPartition</a:t>
-            </a:r>
-            <a:endParaRPr lang="en-US" sz="1600" dirty="0"/>
+              <a:rPr lang="en-US" dirty="0"/>
+              <a:t>E.g., A5-A2-A4 may work for majority of instances, but A1/A3 may work better for some types of instances </a:t>
+            </a:r>
           </a:p>
         </p:txBody>
       </p:sp>
@@ -4750,9 +5310,345 @@
   </p:clrMapOvr>
   <p:extLst>
     <p:ext uri="{6950BFC3-D8DA-4A85-94F7-54DA5524770B}">
-      <p188:commentRel xmlns:p188="http://schemas.microsoft.com/office/powerpoint/2018/8/main" r:id="rId2"/>
+      <p188:commentRel xmlns:p188="http://schemas.microsoft.com/office/powerpoint/2018/8/main" r:id="rId3"/>
     </p:ext>
   </p:extLst>
+</p:sld>
+</file>
+
+<file path=ppt/slides/slide2.xml><?xml version="1.0" encoding="utf-8"?>
+<p:sld xmlns:a="http://schemas.openxmlformats.org/drawingml/2006/main" xmlns:r="http://schemas.openxmlformats.org/officeDocument/2006/relationships" xmlns:p="http://schemas.openxmlformats.org/presentationml/2006/main">
+  <p:cSld>
+    <p:spTree>
+      <p:nvGrpSpPr>
+        <p:cNvPr id="1" name=""/>
+        <p:cNvGrpSpPr/>
+        <p:nvPr/>
+      </p:nvGrpSpPr>
+      <p:grpSpPr>
+        <a:xfrm>
+          <a:off x="0" y="0"/>
+          <a:ext cx="0" cy="0"/>
+          <a:chOff x="0" y="0"/>
+          <a:chExt cx="0" cy="0"/>
+        </a:xfrm>
+      </p:grpSpPr>
+      <p:sp>
+        <p:nvSpPr>
+          <p:cNvPr id="2" name="Title 1">
+            <a:extLst>
+              <a:ext uri="{FF2B5EF4-FFF2-40B4-BE49-F238E27FC236}">
+                <a16:creationId xmlns:a16="http://schemas.microsoft.com/office/drawing/2014/main" id="{643FE663-A383-24FF-9EA1-AC8BAE5D253E}"/>
+              </a:ext>
+            </a:extLst>
+          </p:cNvPr>
+          <p:cNvSpPr>
+            <a:spLocks noGrp="1"/>
+          </p:cNvSpPr>
+          <p:nvPr>
+            <p:ph type="title"/>
+          </p:nvPr>
+        </p:nvSpPr>
+        <p:spPr/>
+        <p:txBody>
+          <a:bodyPr/>
+          <a:lstStyle/>
+          <a:p>
+            <a:r>
+              <a:rPr lang="en-US" dirty="0"/>
+              <a:t>Output</a:t>
+            </a:r>
+          </a:p>
+        </p:txBody>
+      </p:sp>
+      <p:sp>
+        <p:nvSpPr>
+          <p:cNvPr id="3" name="Content Placeholder 2">
+            <a:extLst>
+              <a:ext uri="{FF2B5EF4-FFF2-40B4-BE49-F238E27FC236}">
+                <a16:creationId xmlns:a16="http://schemas.microsoft.com/office/drawing/2014/main" id="{512553A1-FACA-B8E3-19DF-30E98121B5D5}"/>
+              </a:ext>
+            </a:extLst>
+          </p:cNvPr>
+          <p:cNvSpPr>
+            <a:spLocks noGrp="1"/>
+          </p:cNvSpPr>
+          <p:nvPr>
+            <p:ph idx="1"/>
+          </p:nvPr>
+        </p:nvSpPr>
+        <p:spPr/>
+        <p:txBody>
+          <a:bodyPr/>
+          <a:lstStyle/>
+          <a:p>
+            <a:r>
+              <a:rPr lang="en-US" dirty="0"/>
+              <a:t>Check to see if there are any patterns/trends in the instances that impact the </a:t>
+            </a:r>
+            <a:r>
+              <a:rPr lang="en-US"/>
+              <a:t>solution time.</a:t>
+            </a:r>
+          </a:p>
+        </p:txBody>
+      </p:sp>
+    </p:spTree>
+    <p:extLst>
+      <p:ext uri="{BB962C8B-B14F-4D97-AF65-F5344CB8AC3E}">
+        <p14:creationId xmlns:p14="http://schemas.microsoft.com/office/powerpoint/2010/main" val="3727326041"/>
+      </p:ext>
+    </p:extLst>
+  </p:cSld>
+  <p:clrMapOvr>
+    <a:masterClrMapping/>
+  </p:clrMapOvr>
+</p:sld>
+</file>
+
+<file path=ppt/slides/slide3.xml><?xml version="1.0" encoding="utf-8"?>
+<p:sld xmlns:a="http://schemas.openxmlformats.org/drawingml/2006/main" xmlns:r="http://schemas.openxmlformats.org/officeDocument/2006/relationships" xmlns:p="http://schemas.openxmlformats.org/presentationml/2006/main">
+  <p:cSld>
+    <p:spTree>
+      <p:nvGrpSpPr>
+        <p:cNvPr id="1" name=""/>
+        <p:cNvGrpSpPr/>
+        <p:nvPr/>
+      </p:nvGrpSpPr>
+      <p:grpSpPr>
+        <a:xfrm>
+          <a:off x="0" y="0"/>
+          <a:ext cx="0" cy="0"/>
+          <a:chOff x="0" y="0"/>
+          <a:chExt cx="0" cy="0"/>
+        </a:xfrm>
+      </p:grpSpPr>
+      <p:sp>
+        <p:nvSpPr>
+          <p:cNvPr id="2" name="Title 1">
+            <a:extLst>
+              <a:ext uri="{FF2B5EF4-FFF2-40B4-BE49-F238E27FC236}">
+                <a16:creationId xmlns:a16="http://schemas.microsoft.com/office/drawing/2014/main" id="{740EEB7F-751E-0FD8-9401-9F9DB143D4F5}"/>
+              </a:ext>
+            </a:extLst>
+          </p:cNvPr>
+          <p:cNvSpPr>
+            <a:spLocks noGrp="1"/>
+          </p:cNvSpPr>
+          <p:nvPr>
+            <p:ph type="title"/>
+          </p:nvPr>
+        </p:nvSpPr>
+        <p:spPr/>
+        <p:txBody>
+          <a:bodyPr/>
+          <a:lstStyle/>
+          <a:p>
+            <a:r>
+              <a:rPr lang="en-US" dirty="0"/>
+              <a:t>SAA</a:t>
+            </a:r>
+          </a:p>
+        </p:txBody>
+      </p:sp>
+      <p:sp>
+        <p:nvSpPr>
+          <p:cNvPr id="3" name="Content Placeholder 2">
+            <a:extLst>
+              <a:ext uri="{FF2B5EF4-FFF2-40B4-BE49-F238E27FC236}">
+                <a16:creationId xmlns:a16="http://schemas.microsoft.com/office/drawing/2014/main" id="{3D560DAF-D1D5-9099-1B4B-B807EF1ED723}"/>
+              </a:ext>
+            </a:extLst>
+          </p:cNvPr>
+          <p:cNvSpPr>
+            <a:spLocks noGrp="1"/>
+          </p:cNvSpPr>
+          <p:nvPr>
+            <p:ph idx="1"/>
+          </p:nvPr>
+        </p:nvSpPr>
+        <p:spPr/>
+        <p:txBody>
+          <a:bodyPr/>
+          <a:lstStyle/>
+          <a:p>
+            <a:pPr marL="0" indent="0">
+              <a:buNone/>
+            </a:pPr>
+            <a:r>
+              <a:rPr lang="en-US" dirty="0"/>
+              <a:t>Steps</a:t>
+            </a:r>
+          </a:p>
+          <a:p>
+            <a:pPr marL="0" indent="0">
+              <a:buNone/>
+            </a:pPr>
+            <a:r>
+              <a:rPr lang="en-US" dirty="0"/>
+              <a:t>S = empty</a:t>
+            </a:r>
+          </a:p>
+          <a:p>
+            <a:pPr marL="514350" indent="-514350">
+              <a:buAutoNum type="arabicPeriod"/>
+            </a:pPr>
+            <a:r>
+              <a:rPr lang="en-US" dirty="0"/>
+              <a:t>Sample new data points and add to S </a:t>
+            </a:r>
+          </a:p>
+          <a:p>
+            <a:pPr marL="514350" indent="-514350">
+              <a:buAutoNum type="arabicPeriod"/>
+            </a:pPr>
+            <a:r>
+              <a:rPr lang="en-US" dirty="0"/>
+              <a:t>Solve MP (by Benders or </a:t>
+            </a:r>
+            <a:r>
+              <a:rPr lang="en-US" dirty="0" err="1"/>
+              <a:t>APM:Group</a:t>
+            </a:r>
+            <a:r>
+              <a:rPr lang="en-US" dirty="0"/>
+              <a:t> by y-solutions aka paths), Get optimal x-solution for the sample S</a:t>
+            </a:r>
+          </a:p>
+          <a:p>
+            <a:pPr marL="971550" lvl="1" indent="-514350">
+              <a:buAutoNum type="arabicPeriod"/>
+            </a:pPr>
+            <a:r>
+              <a:rPr lang="en-US" dirty="0"/>
+              <a:t>Find an alternative to h-bound</a:t>
+            </a:r>
+          </a:p>
+          <a:p>
+            <a:pPr marL="514350" indent="-514350">
+              <a:buAutoNum type="arabicPeriod"/>
+            </a:pPr>
+            <a:r>
+              <a:rPr lang="en-US" dirty="0"/>
+              <a:t>Go back to 1.</a:t>
+            </a:r>
+          </a:p>
+        </p:txBody>
+      </p:sp>
+    </p:spTree>
+    <p:extLst>
+      <p:ext uri="{BB962C8B-B14F-4D97-AF65-F5344CB8AC3E}">
+        <p14:creationId xmlns:p14="http://schemas.microsoft.com/office/powerpoint/2010/main" val="850482189"/>
+      </p:ext>
+    </p:extLst>
+  </p:cSld>
+  <p:clrMapOvr>
+    <a:masterClrMapping/>
+  </p:clrMapOvr>
+</p:sld>
+</file>
+
+<file path=ppt/slides/slide4.xml><?xml version="1.0" encoding="utf-8"?>
+<p:sld xmlns:a="http://schemas.openxmlformats.org/drawingml/2006/main" xmlns:r="http://schemas.openxmlformats.org/officeDocument/2006/relationships" xmlns:p="http://schemas.openxmlformats.org/presentationml/2006/main">
+  <p:cSld>
+    <p:spTree>
+      <p:nvGrpSpPr>
+        <p:cNvPr id="1" name=""/>
+        <p:cNvGrpSpPr/>
+        <p:nvPr/>
+      </p:nvGrpSpPr>
+      <p:grpSpPr>
+        <a:xfrm>
+          <a:off x="0" y="0"/>
+          <a:ext cx="0" cy="0"/>
+          <a:chOff x="0" y="0"/>
+          <a:chExt cx="0" cy="0"/>
+        </a:xfrm>
+      </p:grpSpPr>
+      <p:sp>
+        <p:nvSpPr>
+          <p:cNvPr id="2" name="Title 1">
+            <a:extLst>
+              <a:ext uri="{FF2B5EF4-FFF2-40B4-BE49-F238E27FC236}">
+                <a16:creationId xmlns:a16="http://schemas.microsoft.com/office/drawing/2014/main" id="{950B83D6-8E56-96B2-4E3F-8A9CFAF60926}"/>
+              </a:ext>
+            </a:extLst>
+          </p:cNvPr>
+          <p:cNvSpPr>
+            <a:spLocks noGrp="1"/>
+          </p:cNvSpPr>
+          <p:nvPr>
+            <p:ph type="title"/>
+          </p:nvPr>
+        </p:nvSpPr>
+        <p:spPr/>
+        <p:txBody>
+          <a:bodyPr/>
+          <a:lstStyle/>
+          <a:p>
+            <a:r>
+              <a:rPr lang="en-US" dirty="0"/>
+              <a:t>Sequential Sampling</a:t>
+            </a:r>
+          </a:p>
+        </p:txBody>
+      </p:sp>
+      <p:sp>
+        <p:nvSpPr>
+          <p:cNvPr id="3" name="Content Placeholder 2">
+            <a:extLst>
+              <a:ext uri="{FF2B5EF4-FFF2-40B4-BE49-F238E27FC236}">
+                <a16:creationId xmlns:a16="http://schemas.microsoft.com/office/drawing/2014/main" id="{F7D073D5-396B-D4D2-7D97-9B3067F39F6A}"/>
+              </a:ext>
+            </a:extLst>
+          </p:cNvPr>
+          <p:cNvSpPr>
+            <a:spLocks noGrp="1"/>
+          </p:cNvSpPr>
+          <p:nvPr>
+            <p:ph idx="1"/>
+          </p:nvPr>
+        </p:nvSpPr>
+        <p:spPr/>
+        <p:txBody>
+          <a:bodyPr/>
+          <a:lstStyle/>
+          <a:p>
+            <a:r>
+              <a:rPr lang="en-US" dirty="0"/>
+              <a:t>Getting additional samples &amp; how to get them</a:t>
+            </a:r>
+          </a:p>
+          <a:p>
+            <a:r>
+              <a:rPr lang="en-US" dirty="0"/>
+              <a:t>Can we do sequential sampling?</a:t>
+            </a:r>
+          </a:p>
+          <a:p>
+            <a:r>
+              <a:rPr lang="en-US" dirty="0"/>
+              <a:t>How can we address the sample size increase to be consistent? </a:t>
+            </a:r>
+          </a:p>
+          <a:p>
+            <a:r>
+              <a:rPr lang="en-US" dirty="0"/>
+              <a:t>Reusing the samples from before? </a:t>
+            </a:r>
+          </a:p>
+        </p:txBody>
+      </p:sp>
+    </p:spTree>
+    <p:extLst>
+      <p:ext uri="{BB962C8B-B14F-4D97-AF65-F5344CB8AC3E}">
+        <p14:creationId xmlns:p14="http://schemas.microsoft.com/office/powerpoint/2010/main" val="2966282882"/>
+      </p:ext>
+    </p:extLst>
+  </p:cSld>
+  <p:clrMapOvr>
+    <a:masterClrMapping/>
+  </p:clrMapOvr>
 </p:sld>
 </file>
 
@@ -5049,4 +5945,299 @@
     </a:ext>
   </a:extLst>
 </a:theme>
+</file>
+
+<file path=ppt/theme/theme2.xml><?xml version="1.0" encoding="utf-8"?>
+<a:theme xmlns:a="http://schemas.openxmlformats.org/drawingml/2006/main" name="Office Theme">
+  <a:themeElements>
+    <a:clrScheme name="Office">
+      <a:dk1>
+        <a:sysClr val="windowText" lastClr="000000"/>
+      </a:dk1>
+      <a:lt1>
+        <a:sysClr val="window" lastClr="FFFFFF"/>
+      </a:lt1>
+      <a:dk2>
+        <a:srgbClr val="44546A"/>
+      </a:dk2>
+      <a:lt2>
+        <a:srgbClr val="E7E6E6"/>
+      </a:lt2>
+      <a:accent1>
+        <a:srgbClr val="4472C4"/>
+      </a:accent1>
+      <a:accent2>
+        <a:srgbClr val="ED7D31"/>
+      </a:accent2>
+      <a:accent3>
+        <a:srgbClr val="A5A5A5"/>
+      </a:accent3>
+      <a:accent4>
+        <a:srgbClr val="FFC000"/>
+      </a:accent4>
+      <a:accent5>
+        <a:srgbClr val="5B9BD5"/>
+      </a:accent5>
+      <a:accent6>
+        <a:srgbClr val="70AD47"/>
+      </a:accent6>
+      <a:hlink>
+        <a:srgbClr val="0563C1"/>
+      </a:hlink>
+      <a:folHlink>
+        <a:srgbClr val="954F72"/>
+      </a:folHlink>
+    </a:clrScheme>
+    <a:fontScheme name="Office">
+      <a:majorFont>
+        <a:latin typeface="Calibri Light" panose="020F0302020204030204"/>
+        <a:ea typeface=""/>
+        <a:cs typeface=""/>
+        <a:font script="Jpan" typeface="游ゴシック Light"/>
+        <a:font script="Hang" typeface="맑은 고딕"/>
+        <a:font script="Hans" typeface="等线 Light"/>
+        <a:font script="Hant" typeface="新細明體"/>
+        <a:font script="Arab" typeface="Times New Roman"/>
+        <a:font script="Hebr" typeface="Times New Roman"/>
+        <a:font script="Thai" typeface="Angsana New"/>
+        <a:font script="Ethi" typeface="Nyala"/>
+        <a:font script="Beng" typeface="Vrinda"/>
+        <a:font script="Gujr" typeface="Shruti"/>
+        <a:font script="Khmr" typeface="MoolBoran"/>
+        <a:font script="Knda" typeface="Tunga"/>
+        <a:font script="Guru" typeface="Raavi"/>
+        <a:font script="Cans" typeface="Euphemia"/>
+        <a:font script="Cher" typeface="Plantagenet Cherokee"/>
+        <a:font script="Yiii" typeface="Microsoft Yi Baiti"/>
+        <a:font script="Tibt" typeface="Microsoft Himalaya"/>
+        <a:font script="Thaa" typeface="MV Boli"/>
+        <a:font script="Deva" typeface="Mangal"/>
+        <a:font script="Telu" typeface="Gautami"/>
+        <a:font script="Taml" typeface="Latha"/>
+        <a:font script="Syrc" typeface="Estrangelo Edessa"/>
+        <a:font script="Orya" typeface="Kalinga"/>
+        <a:font script="Mlym" typeface="Kartika"/>
+        <a:font script="Laoo" typeface="DokChampa"/>
+        <a:font script="Sinh" typeface="Iskoola Pota"/>
+        <a:font script="Mong" typeface="Mongolian Baiti"/>
+        <a:font script="Viet" typeface="Times New Roman"/>
+        <a:font script="Uigh" typeface="Microsoft Uighur"/>
+        <a:font script="Geor" typeface="Sylfaen"/>
+        <a:font script="Armn" typeface="Arial"/>
+        <a:font script="Bugi" typeface="Leelawadee UI"/>
+        <a:font script="Bopo" typeface="Microsoft JhengHei"/>
+        <a:font script="Java" typeface="Javanese Text"/>
+        <a:font script="Lisu" typeface="Segoe UI"/>
+        <a:font script="Mymr" typeface="Myanmar Text"/>
+        <a:font script="Nkoo" typeface="Ebrima"/>
+        <a:font script="Olck" typeface="Nirmala UI"/>
+        <a:font script="Osma" typeface="Ebrima"/>
+        <a:font script="Phag" typeface="Phagspa"/>
+        <a:font script="Syrn" typeface="Estrangelo Edessa"/>
+        <a:font script="Syrj" typeface="Estrangelo Edessa"/>
+        <a:font script="Syre" typeface="Estrangelo Edessa"/>
+        <a:font script="Sora" typeface="Nirmala UI"/>
+        <a:font script="Tale" typeface="Microsoft Tai Le"/>
+        <a:font script="Talu" typeface="Microsoft New Tai Lue"/>
+        <a:font script="Tfng" typeface="Ebrima"/>
+      </a:majorFont>
+      <a:minorFont>
+        <a:latin typeface="Calibri" panose="020F0502020204030204"/>
+        <a:ea typeface=""/>
+        <a:cs typeface=""/>
+        <a:font script="Jpan" typeface="游ゴシック"/>
+        <a:font script="Hang" typeface="맑은 고딕"/>
+        <a:font script="Hans" typeface="等线"/>
+        <a:font script="Hant" typeface="新細明體"/>
+        <a:font script="Arab" typeface="Arial"/>
+        <a:font script="Hebr" typeface="Arial"/>
+        <a:font script="Thai" typeface="Cordia New"/>
+        <a:font script="Ethi" typeface="Nyala"/>
+        <a:font script="Beng" typeface="Vrinda"/>
+        <a:font script="Gujr" typeface="Shruti"/>
+        <a:font script="Khmr" typeface="DaunPenh"/>
+        <a:font script="Knda" typeface="Tunga"/>
+        <a:font script="Guru" typeface="Raavi"/>
+        <a:font script="Cans" typeface="Euphemia"/>
+        <a:font script="Cher" typeface="Plantagenet Cherokee"/>
+        <a:font script="Yiii" typeface="Microsoft Yi Baiti"/>
+        <a:font script="Tibt" typeface="Microsoft Himalaya"/>
+        <a:font script="Thaa" typeface="MV Boli"/>
+        <a:font script="Deva" typeface="Mangal"/>
+        <a:font script="Telu" typeface="Gautami"/>
+        <a:font script="Taml" typeface="Latha"/>
+        <a:font script="Syrc" typeface="Estrangelo Edessa"/>
+        <a:font script="Orya" typeface="Kalinga"/>
+        <a:font script="Mlym" typeface="Kartika"/>
+        <a:font script="Laoo" typeface="DokChampa"/>
+        <a:font script="Sinh" typeface="Iskoola Pota"/>
+        <a:font script="Mong" typeface="Mongolian Baiti"/>
+        <a:font script="Viet" typeface="Arial"/>
+        <a:font script="Uigh" typeface="Microsoft Uighur"/>
+        <a:font script="Geor" typeface="Sylfaen"/>
+        <a:font script="Armn" typeface="Arial"/>
+        <a:font script="Bugi" typeface="Leelawadee UI"/>
+        <a:font script="Bopo" typeface="Microsoft JhengHei"/>
+        <a:font script="Java" typeface="Javanese Text"/>
+        <a:font script="Lisu" typeface="Segoe UI"/>
+        <a:font script="Mymr" typeface="Myanmar Text"/>
+        <a:font script="Nkoo" typeface="Ebrima"/>
+        <a:font script="Olck" typeface="Nirmala UI"/>
+        <a:font script="Osma" typeface="Ebrima"/>
+        <a:font script="Phag" typeface="Phagspa"/>
+        <a:font script="Syrn" typeface="Estrangelo Edessa"/>
+        <a:font script="Syrj" typeface="Estrangelo Edessa"/>
+        <a:font script="Syre" typeface="Estrangelo Edessa"/>
+        <a:font script="Sora" typeface="Nirmala UI"/>
+        <a:font script="Tale" typeface="Microsoft Tai Le"/>
+        <a:font script="Talu" typeface="Microsoft New Tai Lue"/>
+        <a:font script="Tfng" typeface="Ebrima"/>
+      </a:minorFont>
+    </a:fontScheme>
+    <a:fmtScheme name="Office">
+      <a:fillStyleLst>
+        <a:solidFill>
+          <a:schemeClr val="phClr"/>
+        </a:solidFill>
+        <a:gradFill rotWithShape="1">
+          <a:gsLst>
+            <a:gs pos="0">
+              <a:schemeClr val="phClr">
+                <a:lumMod val="110000"/>
+                <a:satMod val="105000"/>
+                <a:tint val="67000"/>
+              </a:schemeClr>
+            </a:gs>
+            <a:gs pos="50000">
+              <a:schemeClr val="phClr">
+                <a:lumMod val="105000"/>
+                <a:satMod val="103000"/>
+                <a:tint val="73000"/>
+              </a:schemeClr>
+            </a:gs>
+            <a:gs pos="100000">
+              <a:schemeClr val="phClr">
+                <a:lumMod val="105000"/>
+                <a:satMod val="109000"/>
+                <a:tint val="81000"/>
+              </a:schemeClr>
+            </a:gs>
+          </a:gsLst>
+          <a:lin ang="5400000" scaled="0"/>
+        </a:gradFill>
+        <a:gradFill rotWithShape="1">
+          <a:gsLst>
+            <a:gs pos="0">
+              <a:schemeClr val="phClr">
+                <a:satMod val="103000"/>
+                <a:lumMod val="102000"/>
+                <a:tint val="94000"/>
+              </a:schemeClr>
+            </a:gs>
+            <a:gs pos="50000">
+              <a:schemeClr val="phClr">
+                <a:satMod val="110000"/>
+                <a:lumMod val="100000"/>
+                <a:shade val="100000"/>
+              </a:schemeClr>
+            </a:gs>
+            <a:gs pos="100000">
+              <a:schemeClr val="phClr">
+                <a:lumMod val="99000"/>
+                <a:satMod val="120000"/>
+                <a:shade val="78000"/>
+              </a:schemeClr>
+            </a:gs>
+          </a:gsLst>
+          <a:lin ang="5400000" scaled="0"/>
+        </a:gradFill>
+      </a:fillStyleLst>
+      <a:lnStyleLst>
+        <a:ln w="6350" cap="flat" cmpd="sng" algn="ctr">
+          <a:solidFill>
+            <a:schemeClr val="phClr"/>
+          </a:solidFill>
+          <a:prstDash val="solid"/>
+          <a:miter lim="800000"/>
+        </a:ln>
+        <a:ln w="12700" cap="flat" cmpd="sng" algn="ctr">
+          <a:solidFill>
+            <a:schemeClr val="phClr"/>
+          </a:solidFill>
+          <a:prstDash val="solid"/>
+          <a:miter lim="800000"/>
+        </a:ln>
+        <a:ln w="19050" cap="flat" cmpd="sng" algn="ctr">
+          <a:solidFill>
+            <a:schemeClr val="phClr"/>
+          </a:solidFill>
+          <a:prstDash val="solid"/>
+          <a:miter lim="800000"/>
+        </a:ln>
+      </a:lnStyleLst>
+      <a:effectStyleLst>
+        <a:effectStyle>
+          <a:effectLst/>
+        </a:effectStyle>
+        <a:effectStyle>
+          <a:effectLst/>
+        </a:effectStyle>
+        <a:effectStyle>
+          <a:effectLst>
+            <a:outerShdw blurRad="57150" dist="19050" dir="5400000" algn="ctr" rotWithShape="0">
+              <a:srgbClr val="000000">
+                <a:alpha val="63000"/>
+              </a:srgbClr>
+            </a:outerShdw>
+          </a:effectLst>
+        </a:effectStyle>
+      </a:effectStyleLst>
+      <a:bgFillStyleLst>
+        <a:solidFill>
+          <a:schemeClr val="phClr"/>
+        </a:solidFill>
+        <a:solidFill>
+          <a:schemeClr val="phClr">
+            <a:tint val="95000"/>
+            <a:satMod val="170000"/>
+          </a:schemeClr>
+        </a:solidFill>
+        <a:gradFill rotWithShape="1">
+          <a:gsLst>
+            <a:gs pos="0">
+              <a:schemeClr val="phClr">
+                <a:tint val="93000"/>
+                <a:satMod val="150000"/>
+                <a:shade val="98000"/>
+                <a:lumMod val="102000"/>
+              </a:schemeClr>
+            </a:gs>
+            <a:gs pos="50000">
+              <a:schemeClr val="phClr">
+                <a:tint val="98000"/>
+                <a:satMod val="130000"/>
+                <a:shade val="90000"/>
+                <a:lumMod val="103000"/>
+              </a:schemeClr>
+            </a:gs>
+            <a:gs pos="100000">
+              <a:schemeClr val="phClr">
+                <a:shade val="63000"/>
+                <a:satMod val="120000"/>
+              </a:schemeClr>
+            </a:gs>
+          </a:gsLst>
+          <a:lin ang="5400000" scaled="0"/>
+        </a:gradFill>
+      </a:bgFillStyleLst>
+    </a:fmtScheme>
+  </a:themeElements>
+  <a:objectDefaults/>
+  <a:extraClrSchemeLst/>
+  <a:extLst>
+    <a:ext uri="{05A4C25C-085E-4340-85A3-A5531E510DB2}">
+      <thm15:themeFamily xmlns:thm15="http://schemas.microsoft.com/office/thememl/2012/main" name="Office Theme" id="{62F939B6-93AF-4DB8-9C6B-D6C7DFDC589F}" vid="{4A3C46E8-61CC-4603-A589-7422A47A8E4A}"/>
+    </a:ext>
+  </a:extLst>
+</a:theme>
 </file>
--- a/Documentation/Workflow.pptx
+++ b/Documentation/Workflow.pptx
@@ -5384,11 +5384,7 @@
           <a:p>
             <a:r>
               <a:rPr lang="en-US" dirty="0"/>
-              <a:t>Check to see if there are any patterns/trends in the instances that impact the </a:t>
-            </a:r>
-            <a:r>
-              <a:rPr lang="en-US"/>
-              <a:t>solution time.</a:t>
+              <a:t>Check to see if there are any patterns/trends in the instances that impact the solution time.</a:t>
             </a:r>
           </a:p>
         </p:txBody>
